--- a/system-design-101/vi/lessons/sd-04-026/slides/sd-04-026.pptx
+++ b/system-design-101/vi/lessons/sd-04-026/slides/sd-04-026.pptx
@@ -3412,51 +3412,7 @@
                 <a:ea typeface="Be Vietnam Pro" pitchFamily="34" charset="-122"/>
                 <a:cs typeface="Be Vietnam Pro" pitchFamily="34" charset="-120"/>
               </a:rPr>
-              <a:t> trúc: hỏi</a:t>
-            </a:r>
-            <a:r>
-              <a:rPr lang="en-US" sz="2550" dirty="0" spc="-19" kern="0">
-                <a:solidFill>
-                  <a:srgbClr val="F3EEE3"/>
-                </a:solidFill>
-                <a:latin typeface="Be Vietnam Pro" pitchFamily="34" charset="0"/>
-                <a:ea typeface="Be Vietnam Pro" pitchFamily="34" charset="-122"/>
-                <a:cs typeface="Be Vietnam Pro" pitchFamily="34" charset="-120"/>
-              </a:rPr>
-              <a:t> và</a:t>
-            </a:r>
-            <a:r>
-              <a:rPr lang="en-US" sz="2550" dirty="0" spc="0" kern="0">
-                <a:solidFill>
-                  <a:srgbClr val="F3EEE3"/>
-                </a:solidFill>
-                <a:latin typeface="Be Vietnam Pro" pitchFamily="34" charset="0"/>
-                <a:ea typeface="Be Vietnam Pro" pitchFamily="34" charset="-122"/>
-                <a:cs typeface="Be Vietnam Pro" pitchFamily="34" charset="-120"/>
-              </a:rPr>
-              <a:t> ghi</a:t>
-            </a:r>
-            <a:r>
-              <a:rPr lang="en-US" sz="2550" dirty="0" spc="-2" kern="0">
-                <a:solidFill>
-                  <a:srgbClr val="F3EEE3"/>
-                </a:solidFill>
-                <a:latin typeface="Be Vietnam Pro" pitchFamily="34" charset="0"/>
-                <a:ea typeface="Be Vietnam Pro" pitchFamily="34" charset="-122"/>
-                <a:cs typeface="Be Vietnam Pro" pitchFamily="34" charset="-120"/>
-              </a:rPr>
-              <a:t> dữ</a:t>
-            </a:r>
-            <a:r>
-              <a:rPr lang="en-US" sz="2550" dirty="0" spc="2" kern="0">
-                <a:solidFill>
-                  <a:srgbClr val="F3EEE3"/>
-                </a:solidFill>
-                <a:latin typeface="Be Vietnam Pro" pitchFamily="34" charset="0"/>
-                <a:ea typeface="Be Vietnam Pro" pitchFamily="34" charset="-122"/>
-                <a:cs typeface="Be Vietnam Pro" pitchFamily="34" charset="-120"/>
-              </a:rPr>
-              <a:t> liệu.</a:t>
+              <a:t> trúc.</a:t>
             </a:r>
             <a:endParaRPr lang="en-US" sz="2550" dirty="0"/>
           </a:p>
@@ -3686,7 +3642,7 @@
               <a:t> hợp</a:t>
             </a:r>
             <a:r>
-              <a:rPr lang="en-US" sz="2550" dirty="0" spc="17" kern="0">
+              <a:rPr lang="en-US" sz="2550" dirty="0" spc="-3" kern="0">
                 <a:solidFill>
                   <a:srgbClr val="F3EEE3"/>
                 </a:solidFill>
@@ -3694,21 +3650,10 @@
                 <a:ea typeface="Be Vietnam Pro" pitchFamily="34" charset="-122"/>
                 <a:cs typeface="Be Vietnam Pro" pitchFamily="34" charset="-120"/>
               </a:rPr>
-              <a:t> để</a:t>
-            </a:r>
-            <a:r>
-              <a:rPr lang="en-US" sz="2550" dirty="0" spc="-3" kern="0">
-                <a:solidFill>
-                  <a:srgbClr val="F3EEE3"/>
-                </a:solidFill>
-                <a:latin typeface="Be Vietnam Pro" pitchFamily="34" charset="0"/>
-                <a:ea typeface="Be Vietnam Pro" pitchFamily="34" charset="-122"/>
-                <a:cs typeface="Be Vietnam Pro" pitchFamily="34" charset="-120"/>
-              </a:rPr>
               <a:t> báo</a:t>
             </a:r>
             <a:r>
-              <a:rPr lang="en-US" sz="2550" dirty="0" spc="2" kern="0">
+              <a:rPr lang="en-US" sz="2550" dirty="0" spc="1" kern="0">
                 <a:solidFill>
                   <a:srgbClr val="F3EEE3"/>
                 </a:solidFill>
@@ -11004,7 +10949,7 @@
                 <a:ea typeface="Be Vietnam Pro" pitchFamily="34" charset="-122"/>
                 <a:cs typeface="Be Vietnam Pro" pitchFamily="34" charset="-120"/>
               </a:rPr>
-              <a:t> ở đúng</a:t>
+              <a:t> ở</a:t>
             </a:r>
             <a:r>
               <a:rPr lang="en-US" sz="2700" dirty="0" spc="-7" kern="0">
@@ -11018,7 +10963,7 @@
               <a:t> một</a:t>
             </a:r>
             <a:r>
-              <a:rPr lang="en-US" sz="2700" dirty="0" spc="-2" kern="0">
+              <a:rPr lang="en-US" sz="2700" dirty="0" spc="-3" kern="0">
                 <a:solidFill>
                   <a:srgbClr val="F3EEE3"/>
                 </a:solidFill>
@@ -11029,7 +10974,7 @@
               <a:t> dòng:</a:t>
             </a:r>
             <a:r>
-              <a:rPr lang="en-US" sz="2700" dirty="0" spc="5" kern="0">
+              <a:rPr lang="en-US" sz="2700" dirty="0" spc="6" kern="0">
                 <a:solidFill>
                   <a:srgbClr val="F3EEE3"/>
                 </a:solidFill>
@@ -11176,15 +11121,26 @@
               <a:buNone/>
             </a:pPr>
             <a:r>
-              <a:rPr lang="en-US" sz="2692" dirty="0" spc="-6" kern="0">
-                <a:solidFill>
-                  <a:srgbClr val="14161C"/>
-                </a:solidFill>
-                <a:latin typeface="Be Vietnam Pro" pitchFamily="34" charset="0"/>
-                <a:ea typeface="Be Vietnam Pro" pitchFamily="34" charset="-122"/>
-                <a:cs typeface="Be Vietnam Pro" pitchFamily="34" charset="-120"/>
-              </a:rPr>
-              <a:t>Viết</a:t>
+              <a:rPr lang="en-US" sz="2692" dirty="0" spc="14" kern="0">
+                <a:solidFill>
+                  <a:srgbClr val="14161C"/>
+                </a:solidFill>
+                <a:latin typeface="Be Vietnam Pro" pitchFamily="34" charset="0"/>
+                <a:ea typeface="Be Vietnam Pro" pitchFamily="34" charset="-122"/>
+                <a:cs typeface="Be Vietnam Pro" pitchFamily="34" charset="-120"/>
+              </a:rPr>
+              <a:t>SQL</a:t>
+            </a:r>
+            <a:r>
+              <a:rPr lang="en-US" sz="2692" dirty="0" spc="0" kern="0">
+                <a:solidFill>
+                  <a:srgbClr val="14161C"/>
+                </a:solidFill>
+                <a:latin typeface="Be Vietnam Pro" pitchFamily="34" charset="0"/>
+                <a:ea typeface="Be Vietnam Pro" pitchFamily="34" charset="-122"/>
+                <a:cs typeface="Be Vietnam Pro" pitchFamily="34" charset="-120"/>
+              </a:rPr>
+              <a:t> không</a:t>
             </a:r>
             <a:r>
               <a:rPr lang="en-US" sz="2692" dirty="0" spc="-2" kern="0">
@@ -11195,7 +11151,18 @@
                 <a:ea typeface="Be Vietnam Pro" pitchFamily="34" charset="-122"/>
                 <a:cs typeface="Be Vietnam Pro" pitchFamily="34" charset="-120"/>
               </a:rPr>
-              <a:t> bằng</a:t>
+              <a:t> cần</a:t>
+            </a:r>
+            <a:r>
+              <a:rPr lang="en-US" sz="2692" dirty="0" spc="-5" kern="0">
+                <a:solidFill>
+                  <a:srgbClr val="14161C"/>
+                </a:solidFill>
+                <a:latin typeface="Be Vietnam Pro" pitchFamily="34" charset="0"/>
+                <a:ea typeface="Be Vietnam Pro" pitchFamily="34" charset="-122"/>
+                <a:cs typeface="Be Vietnam Pro" pitchFamily="34" charset="-120"/>
+              </a:rPr>
+              <a:t> biết</a:t>
             </a:r>
             <a:r>
               <a:rPr lang="en-US" sz="2692" dirty="0" spc="8" kern="0">
@@ -11206,50 +11173,6 @@
                 <a:ea typeface="Be Vietnam Pro" pitchFamily="34" charset="-122"/>
                 <a:cs typeface="Be Vietnam Pro" pitchFamily="34" charset="-120"/>
               </a:rPr>
-              <a:t> SQL,</a:t>
-            </a:r>
-            <a:r>
-              <a:rPr lang="en-US" sz="2692" dirty="0" spc="0" kern="0">
-                <a:solidFill>
-                  <a:srgbClr val="14161C"/>
-                </a:solidFill>
-                <a:latin typeface="Be Vietnam Pro" pitchFamily="34" charset="0"/>
-                <a:ea typeface="Be Vietnam Pro" pitchFamily="34" charset="-122"/>
-                <a:cs typeface="Be Vietnam Pro" pitchFamily="34" charset="-120"/>
-              </a:rPr>
-              <a:t> không</a:t>
-            </a:r>
-            <a:r>
-              <a:rPr lang="en-US" sz="2692" dirty="0" spc="-1" kern="0">
-                <a:solidFill>
-                  <a:srgbClr val="14161C"/>
-                </a:solidFill>
-                <a:latin typeface="Be Vietnam Pro" pitchFamily="34" charset="0"/>
-                <a:ea typeface="Be Vietnam Pro" pitchFamily="34" charset="-122"/>
-                <a:cs typeface="Be Vietnam Pro" pitchFamily="34" charset="-120"/>
-              </a:rPr>
-              <a:t> cần</a:t>
-            </a:r>
-            <a:r>
-              <a:rPr lang="en-US" sz="2692" dirty="0" spc="-5" kern="0">
-                <a:solidFill>
-                  <a:srgbClr val="14161C"/>
-                </a:solidFill>
-                <a:latin typeface="Be Vietnam Pro" pitchFamily="34" charset="0"/>
-                <a:ea typeface="Be Vietnam Pro" pitchFamily="34" charset="-122"/>
-                <a:cs typeface="Be Vietnam Pro" pitchFamily="34" charset="-120"/>
-              </a:rPr>
-              <a:t> biết</a:t>
-            </a:r>
-            <a:r>
-              <a:rPr lang="en-US" sz="2692" dirty="0" spc="8" kern="0">
-                <a:solidFill>
-                  <a:srgbClr val="14161C"/>
-                </a:solidFill>
-                <a:latin typeface="Be Vietnam Pro" pitchFamily="34" charset="0"/>
-                <a:ea typeface="Be Vietnam Pro" pitchFamily="34" charset="-122"/>
-                <a:cs typeface="Be Vietnam Pro" pitchFamily="34" charset="-120"/>
-              </a:rPr>
               <a:t> trước đường</a:t>
             </a:r>
             <a:r>
@@ -11264,7 +11187,7 @@
               <a:t> đi:</a:t>
             </a:r>
             <a:r>
-              <a:rPr lang="en-US" sz="2692" dirty="0" spc="-3" kern="0">
+              <a:rPr lang="en-US" sz="2692" dirty="0" spc="-2" kern="0">
                 <a:solidFill>
                   <a:srgbClr val="14161C"/>
                 </a:solidFill>
@@ -13783,17 +13706,6 @@
               <a:t> thấy</a:t>
             </a:r>
             <a:r>
-              <a:rPr lang="en-US" sz="3000" dirty="0" spc="2" kern="0">
-                <a:solidFill>
-                  <a:srgbClr val="F3EEE3"/>
-                </a:solidFill>
-                <a:latin typeface="Be Vietnam Pro" pitchFamily="34" charset="0"/>
-                <a:ea typeface="Be Vietnam Pro" pitchFamily="34" charset="-122"/>
-                <a:cs typeface="Be Vietnam Pro" pitchFamily="34" charset="-120"/>
-              </a:rPr>
-              <a:t> chỗ</a:t>
-            </a:r>
-            <a:r>
               <a:rPr lang="en-US" sz="3000" dirty="0" spc="1" kern="0">
                 <a:solidFill>
                   <a:srgbClr val="F3EEE3"/>
@@ -14079,17 +13991,6 @@
                 <a:cs typeface="Be Vietnam Pro" pitchFamily="34" charset="-120"/>
               </a:rPr>
               <a:t> ít</a:t>
-            </a:r>
-            <a:r>
-              <a:rPr lang="en-US" sz="3000" dirty="0" spc="3" kern="0">
-                <a:solidFill>
-                  <a:srgbClr val="F3EEE3"/>
-                </a:solidFill>
-                <a:latin typeface="Be Vietnam Pro" pitchFamily="34" charset="0"/>
-                <a:ea typeface="Be Vietnam Pro" pitchFamily="34" charset="-122"/>
-                <a:cs typeface="Be Vietnam Pro" pitchFamily="34" charset="-120"/>
-              </a:rPr>
-              <a:t> phép</a:t>
             </a:r>
             <a:r>
               <a:rPr lang="en-US" sz="3000" dirty="0" spc="1" kern="0">
@@ -14692,7 +14593,7 @@
               <a:t> phẩm,</a:t>
             </a:r>
             <a:r>
-              <a:rPr lang="en-US" sz="6000" dirty="0" spc="-20" kern="0">
+              <a:rPr lang="en-US" sz="6000" dirty="0" spc="-12" kern="0">
                 <a:solidFill>
                   <a:srgbClr val="14161C"/>
                 </a:solidFill>
@@ -14700,10 +14601,10 @@
                 <a:ea typeface="Bricolage Grotesque ExtraBold" pitchFamily="34" charset="-122"/>
                 <a:cs typeface="Bricolage Grotesque ExtraBold" pitchFamily="34" charset="-120"/>
               </a:rPr>
-              <a:t> tên</a:t>
-            </a:r>
-            <a:r>
-              <a:rPr lang="en-US" sz="6000" dirty="0" spc="-11" kern="0">
+              <a:t> ngành</a:t>
+            </a:r>
+            <a:r>
+              <a:rPr lang="en-US" sz="6000" dirty="0" spc="1" kern="0">
                 <a:solidFill>
                   <a:srgbClr val="14161C"/>
                 </a:solidFill>
@@ -14711,10 +14612,10 @@
                 <a:ea typeface="Bricolage Grotesque ExtraBold" pitchFamily="34" charset="-122"/>
                 <a:cs typeface="Bricolage Grotesque ExtraBold" pitchFamily="34" charset="-120"/>
               </a:rPr>
-              <a:t> ngành</a:t>
-            </a:r>
-            <a:r>
-              <a:rPr lang="en-US" sz="6000" dirty="0" spc="0" kern="0">
+              <a:t> hay</a:t>
+            </a:r>
+            <a:r>
+              <a:rPr lang="en-US" sz="6000" dirty="0" spc="14" kern="0">
                 <a:solidFill>
                   <a:srgbClr val="14161C"/>
                 </a:solidFill>
@@ -14722,10 +14623,10 @@
                 <a:ea typeface="Bricolage Grotesque ExtraBold" pitchFamily="34" charset="-122"/>
                 <a:cs typeface="Bricolage Grotesque ExtraBold" pitchFamily="34" charset="-120"/>
               </a:rPr>
-              <a:t> hay</a:t>
-            </a:r>
-            <a:r>
-              <a:rPr lang="en-US" sz="6000" dirty="0" spc="11" kern="0">
+              <a:t> đổi</a:t>
+            </a:r>
+            <a:r>
+              <a:rPr lang="en-US" sz="6000" dirty="0" spc="-16" kern="0">
                 <a:solidFill>
                   <a:srgbClr val="14161C"/>
                 </a:solidFill>
@@ -14733,10 +14634,10 @@
                 <a:ea typeface="Bricolage Grotesque ExtraBold" pitchFamily="34" charset="-122"/>
                 <a:cs typeface="Bricolage Grotesque ExtraBold" pitchFamily="34" charset="-120"/>
               </a:rPr>
-              <a:t> đổi:</a:t>
-            </a:r>
-            <a:r>
-              <a:rPr lang="en-US" sz="6000" dirty="0" spc="1" kern="0">
+              <a:t> tên:</a:t>
+            </a:r>
+            <a:r>
+              <a:rPr lang="en-US" sz="6000" dirty="0" spc="0" kern="0">
                 <a:solidFill>
                   <a:srgbClr val="14161C"/>
                 </a:solidFill>
@@ -14744,10 +14645,10 @@
                 <a:ea typeface="Bricolage Grotesque ExtraBold" pitchFamily="34" charset="-122"/>
                 <a:cs typeface="Bricolage Grotesque ExtraBold" pitchFamily="34" charset="-120"/>
               </a:rPr>
-              <a:t> sao</a:t>
-            </a:r>
-            <a:r>
-              <a:rPr lang="en-US" sz="6000" dirty="0" spc="0" kern="0">
+              <a:t> chọn</a:t>
+            </a:r>
+            <a:r>
+              <a:rPr lang="en-US" sz="6000" dirty="0" spc="5" kern="0">
                 <a:solidFill>
                   <a:srgbClr val="14161C"/>
                 </a:solidFill>
@@ -14755,10 +14656,10 @@
                 <a:ea typeface="Bricolage Grotesque ExtraBold" pitchFamily="34" charset="-122"/>
                 <a:cs typeface="Bricolage Grotesque ExtraBold" pitchFamily="34" charset="-120"/>
               </a:rPr>
-              <a:t> hay</a:t>
-            </a:r>
-            <a:r>
-              <a:rPr lang="en-US" sz="6000" dirty="0" spc="1" kern="0">
+              <a:t> kiểu</a:t>
+            </a:r>
+            <a:r>
+              <a:rPr lang="en-US" sz="6000" dirty="0" spc="-34" kern="0">
                 <a:solidFill>
                   <a:srgbClr val="14161C"/>
                 </a:solidFill>
@@ -14766,18 +14667,7 @@
                 <a:ea typeface="Bricolage Grotesque ExtraBold" pitchFamily="34" charset="-122"/>
                 <a:cs typeface="Bricolage Grotesque ExtraBold" pitchFamily="34" charset="-120"/>
               </a:rPr>
-              <a:t> bông</a:t>
-            </a:r>
-            <a:r>
-              <a:rPr lang="en-US" sz="6000" dirty="0" spc="-1" kern="0">
-                <a:solidFill>
-                  <a:srgbClr val="14161C"/>
-                </a:solidFill>
-                <a:latin typeface="Bricolage Grotesque ExtraBold" pitchFamily="34" charset="0"/>
-                <a:ea typeface="Bricolage Grotesque ExtraBold" pitchFamily="34" charset="-122"/>
-                <a:cs typeface="Bricolage Grotesque ExtraBold" pitchFamily="34" charset="-120"/>
-              </a:rPr>
-              <a:t> tuyết?</a:t>
+              <a:t> nào?</a:t>
             </a:r>
             <a:endParaRPr lang="en-US" sz="6000" dirty="0"/>
           </a:p>
@@ -15502,6 +15392,39 @@
               <a:t>Không</a:t>
             </a:r>
             <a:r>
+              <a:rPr lang="en-US" sz="2550" b="1" dirty="0" spc="7" kern="0">
+                <a:solidFill>
+                  <a:srgbClr val="F3EEE3"/>
+                </a:solidFill>
+                <a:latin typeface="Be Vietnam Pro" pitchFamily="34" charset="0"/>
+                <a:ea typeface="Be Vietnam Pro" pitchFamily="34" charset="-122"/>
+                <a:cs typeface="Be Vietnam Pro" pitchFamily="34" charset="-120"/>
+              </a:rPr>
+              <a:t> đáp</a:t>
+            </a:r>
+            <a:r>
+              <a:rPr lang="en-US" sz="2550" b="1" dirty="0" spc="3" kern="0">
+                <a:solidFill>
+                  <a:srgbClr val="F3EEE3"/>
+                </a:solidFill>
+                <a:latin typeface="Be Vietnam Pro" pitchFamily="34" charset="0"/>
+                <a:ea typeface="Be Vietnam Pro" pitchFamily="34" charset="-122"/>
+                <a:cs typeface="Be Vietnam Pro" pitchFamily="34" charset="-120"/>
+              </a:rPr>
+              <a:t> án</a:t>
+            </a:r>
+            <a:r>
+              <a:rPr lang="en-US" sz="2550" b="1" dirty="0" spc="0" kern="0">
+                <a:solidFill>
+                  <a:srgbClr val="F3EEE3"/>
+                </a:solidFill>
+                <a:latin typeface="Be Vietnam Pro" pitchFamily="34" charset="0"/>
+                <a:ea typeface="Be Vietnam Pro" pitchFamily="34" charset="-122"/>
+                <a:cs typeface="Be Vietnam Pro" pitchFamily="34" charset="-120"/>
+              </a:rPr>
+              <a:t> duy</a:t>
+            </a:r>
+            <a:r>
               <a:rPr lang="en-US" sz="2550" b="1" dirty="0" spc="-4" kern="0">
                 <a:solidFill>
                   <a:srgbClr val="F3EEE3"/>
@@ -15510,10 +15433,10 @@
                 <a:ea typeface="Be Vietnam Pro" pitchFamily="34" charset="-122"/>
                 <a:cs typeface="Be Vietnam Pro" pitchFamily="34" charset="-120"/>
               </a:rPr>
-              <a:t> có</a:t>
-            </a:r>
-            <a:r>
-              <a:rPr lang="en-US" sz="2550" b="1" dirty="0" spc="7" kern="0">
+              <a:t> nhất:</a:t>
+            </a:r>
+            <a:r>
+              <a:rPr lang="en-US" sz="2550" b="1" dirty="0" spc="11" kern="0">
                 <a:solidFill>
                   <a:srgbClr val="F3EEE3"/>
                 </a:solidFill>
@@ -15521,10 +15444,10 @@
                 <a:ea typeface="Be Vietnam Pro" pitchFamily="34" charset="-122"/>
                 <a:cs typeface="Be Vietnam Pro" pitchFamily="34" charset="-120"/>
               </a:rPr>
-              <a:t> đáp</a:t>
-            </a:r>
-            <a:r>
-              <a:rPr lang="en-US" sz="2550" b="1" dirty="0" spc="4" kern="0">
+              <a:t> sửa</a:t>
+            </a:r>
+            <a:r>
+              <a:rPr lang="en-US" sz="2550" b="1" dirty="0" spc="0" kern="0">
                 <a:solidFill>
                   <a:srgbClr val="F3EEE3"/>
                 </a:solidFill>
@@ -15532,10 +15455,10 @@
                 <a:ea typeface="Be Vietnam Pro" pitchFamily="34" charset="-122"/>
                 <a:cs typeface="Be Vietnam Pro" pitchFamily="34" charset="-120"/>
               </a:rPr>
-              <a:t> án</a:t>
-            </a:r>
-            <a:r>
-              <a:rPr lang="en-US" sz="2550" b="1" dirty="0" spc="-1" kern="0">
+              <a:t> nhiều</a:t>
+            </a:r>
+            <a:r>
+              <a:rPr lang="en-US" sz="2550" b="1" dirty="0" spc="-11" kern="0">
                 <a:solidFill>
                   <a:srgbClr val="F3EEE3"/>
                 </a:solidFill>
@@ -15543,10 +15466,10 @@
                 <a:ea typeface="Be Vietnam Pro" pitchFamily="34" charset="-122"/>
                 <a:cs typeface="Be Vietnam Pro" pitchFamily="34" charset="-120"/>
               </a:rPr>
-              <a:t> duy</a:t>
-            </a:r>
-            <a:r>
-              <a:rPr lang="en-US" sz="2550" b="1" dirty="0" spc="-4" kern="0">
+              <a:t> hay</a:t>
+            </a:r>
+            <a:r>
+              <a:rPr lang="en-US" sz="2550" b="1" dirty="0" spc="-2" kern="0">
                 <a:solidFill>
                   <a:srgbClr val="F3EEE3"/>
                 </a:solidFill>
@@ -15554,7 +15477,7 @@
                 <a:ea typeface="Be Vietnam Pro" pitchFamily="34" charset="-122"/>
                 <a:cs typeface="Be Vietnam Pro" pitchFamily="34" charset="-120"/>
               </a:rPr>
-              <a:t> nhất:</a:t>
+              <a:t> hỏi</a:t>
             </a:r>
             <a:r>
               <a:rPr lang="en-US" sz="2550" b="1" dirty="0" spc="0" kern="0">
@@ -15565,73 +15488,7 @@
                 <a:ea typeface="Be Vietnam Pro" pitchFamily="34" charset="-122"/>
                 <a:cs typeface="Be Vietnam Pro" pitchFamily="34" charset="-120"/>
               </a:rPr>
-              <a:t> việc</a:t>
-            </a:r>
-            <a:r>
-              <a:rPr lang="en-US" sz="2550" b="1" dirty="0" spc="11" kern="0">
-                <a:solidFill>
-                  <a:srgbClr val="F3EEE3"/>
-                </a:solidFill>
-                <a:latin typeface="Be Vietnam Pro" pitchFamily="34" charset="0"/>
-                <a:ea typeface="Be Vietnam Pro" pitchFamily="34" charset="-122"/>
-                <a:cs typeface="Be Vietnam Pro" pitchFamily="34" charset="-120"/>
-              </a:rPr>
-              <a:t> sửa</a:t>
-            </a:r>
-            <a:r>
-              <a:rPr lang="en-US" sz="2550" b="1" dirty="0" spc="-12" kern="0">
-                <a:solidFill>
-                  <a:srgbClr val="F3EEE3"/>
-                </a:solidFill>
-                <a:latin typeface="Be Vietnam Pro" pitchFamily="34" charset="0"/>
-                <a:ea typeface="Be Vietnam Pro" pitchFamily="34" charset="-122"/>
-                <a:cs typeface="Be Vietnam Pro" pitchFamily="34" charset="-120"/>
-              </a:rPr>
-              <a:t> hay</a:t>
-            </a:r>
-            <a:r>
-              <a:rPr lang="en-US" sz="2550" b="1" dirty="0" spc="0" kern="0">
-                <a:solidFill>
-                  <a:srgbClr val="F3EEE3"/>
-                </a:solidFill>
-                <a:latin typeface="Be Vietnam Pro" pitchFamily="34" charset="0"/>
-                <a:ea typeface="Be Vietnam Pro" pitchFamily="34" charset="-122"/>
-                <a:cs typeface="Be Vietnam Pro" pitchFamily="34" charset="-120"/>
-              </a:rPr>
-              <a:t> việc</a:t>
-            </a:r>
-            <a:r>
-              <a:rPr lang="en-US" sz="2550" b="1" dirty="0" spc="-2" kern="0">
-                <a:solidFill>
-                  <a:srgbClr val="F3EEE3"/>
-                </a:solidFill>
-                <a:latin typeface="Be Vietnam Pro" pitchFamily="34" charset="0"/>
-                <a:ea typeface="Be Vietnam Pro" pitchFamily="34" charset="-122"/>
-                <a:cs typeface="Be Vietnam Pro" pitchFamily="34" charset="-120"/>
-              </a:rPr>
-              <a:t> hỏi</a:t>
-            </a:r>
-            <a:r>
-              <a:rPr lang="en-US" sz="2550" b="1" dirty="0" spc="1" kern="0">
-                <a:solidFill>
-                  <a:srgbClr val="F3EEE3"/>
-                </a:solidFill>
-                <a:latin typeface="Be Vietnam Pro" pitchFamily="34" charset="0"/>
-                <a:ea typeface="Be Vietnam Pro" pitchFamily="34" charset="-122"/>
-                <a:cs typeface="Be Vietnam Pro" pitchFamily="34" charset="-120"/>
-              </a:rPr>
-              <a:t> nhiều</a:t>
-            </a:r>
-            <a:r>
-              <a:rPr lang="en-US" sz="2550" b="1" dirty="0" spc="-3" kern="0">
-                <a:solidFill>
-                  <a:srgbClr val="F3EEE3"/>
-                </a:solidFill>
-                <a:latin typeface="Be Vietnam Pro" pitchFamily="34" charset="0"/>
-                <a:ea typeface="Be Vietnam Pro" pitchFamily="34" charset="-122"/>
-                <a:cs typeface="Be Vietnam Pro" pitchFamily="34" charset="-120"/>
-              </a:rPr>
-              <a:t> hơn?</a:t>
+              <a:t> nhiều?</a:t>
             </a:r>
             <a:endParaRPr lang="en-US" sz="2550" dirty="0"/>
           </a:p>
@@ -16277,17 +16134,6 @@
                 <a:cs typeface="Bricolage Grotesque ExtraBold" pitchFamily="34" charset="-120"/>
               </a:rPr>
               <a:t> ghi</a:t>
-            </a:r>
-            <a:r>
-              <a:rPr lang="en-US" sz="7800" dirty="0" spc="3" kern="0">
-                <a:solidFill>
-                  <a:srgbClr val="14161C"/>
-                </a:solidFill>
-                <a:latin typeface="Bricolage Grotesque ExtraBold" pitchFamily="34" charset="0"/>
-                <a:ea typeface="Bricolage Grotesque ExtraBold" pitchFamily="34" charset="-122"/>
-                <a:cs typeface="Bricolage Grotesque ExtraBold" pitchFamily="34" charset="-120"/>
-              </a:rPr>
-              <a:t> phải</a:t>
             </a:r>
             <a:r>
               <a:rPr lang="en-US" sz="7800" dirty="0" spc="12" kern="0">

--- a/system-design-101/vi/lessons/sd-04-026/slides/sd-04-026.pptx
+++ b/system-design-101/vi/lessons/sd-04-026/slides/sd-04-026.pptx
@@ -1790,7 +1790,7 @@
         <p:spPr>
           <a:xfrm>
             <a:off x="914400" y="1428750"/>
-            <a:ext cx="8572500" cy="2286000"/>
+            <a:ext cx="9144000" cy="1333500"/>
           </a:xfrm>
           <a:prstGeom prst="rect">
             <a:avLst/>
@@ -1799,17 +1799,17 @@
           <a:ln/>
         </p:spPr>
         <p:txBody>
-          <a:bodyPr wrap="square" lIns="0" tIns="64294" rIns="0" bIns="-64294" rtlCol="0" anchor="t"/>
+          <a:bodyPr wrap="square" lIns="0" tIns="69437" rIns="0" bIns="-69437" rtlCol="0" anchor="t"/>
           <a:lstStyle/>
           <a:p>
             <a:pPr algn="l" indent="0" marL="0">
               <a:lnSpc>
-                <a:spcPts val="7875"/>
+                <a:spcPts val="8505"/>
               </a:lnSpc>
               <a:buNone/>
             </a:pPr>
             <a:r>
-              <a:rPr lang="en-US" sz="7500" dirty="0" spc="0" kern="0">
+              <a:rPr lang="en-US" sz="8100" dirty="0" spc="0" kern="0">
                 <a:solidFill>
                   <a:srgbClr val="F3EEE3"/>
                 </a:solidFill>
@@ -1817,10 +1817,10 @@
                 <a:ea typeface="Bricolage Grotesque ExtraBold" pitchFamily="34" charset="-122"/>
                 <a:cs typeface="Bricolage Grotesque ExtraBold" pitchFamily="34" charset="-120"/>
               </a:rPr>
-              <a:t>Sáu mô</a:t>
-            </a:r>
-            <a:r>
-              <a:rPr lang="en-US" sz="7500" dirty="0" spc="-15" kern="0">
+              <a:t>Sáu</a:t>
+            </a:r>
+            <a:r>
+              <a:rPr lang="en-US" sz="8100" dirty="0" spc="1" kern="0">
                 <a:solidFill>
                   <a:srgbClr val="F3EEE3"/>
                 </a:solidFill>
@@ -1828,10 +1828,10 @@
                 <a:ea typeface="Bricolage Grotesque ExtraBold" pitchFamily="34" charset="-122"/>
                 <a:cs typeface="Bricolage Grotesque ExtraBold" pitchFamily="34" charset="-120"/>
               </a:rPr>
-              <a:t> hình</a:t>
-            </a:r>
-            <a:r>
-              <a:rPr lang="en-US" sz="7500" dirty="0" spc="-3" kern="0">
+              <a:t> mô</a:t>
+            </a:r>
+            <a:r>
+              <a:rPr lang="en-US" sz="8100" dirty="0" spc="-17" kern="0">
                 <a:solidFill>
                   <a:srgbClr val="F3EEE3"/>
                 </a:solidFill>
@@ -1839,10 +1839,10 @@
                 <a:ea typeface="Bricolage Grotesque ExtraBold" pitchFamily="34" charset="-122"/>
                 <a:cs typeface="Bricolage Grotesque ExtraBold" pitchFamily="34" charset="-120"/>
               </a:rPr>
-              <a:t> dữ</a:t>
-            </a:r>
-            <a:r>
-              <a:rPr lang="en-US" sz="7500" dirty="0" spc="7" kern="0">
+              <a:t> hình</a:t>
+            </a:r>
+            <a:r>
+              <a:rPr lang="en-US" sz="8100" dirty="0" spc="-1" kern="0">
                 <a:solidFill>
                   <a:srgbClr val="F3EEE3"/>
                 </a:solidFill>
@@ -1850,9 +1850,20 @@
                 <a:ea typeface="Bricolage Grotesque ExtraBold" pitchFamily="34" charset="-122"/>
                 <a:cs typeface="Bricolage Grotesque ExtraBold" pitchFamily="34" charset="-120"/>
               </a:rPr>
+              <a:t> dữ</a:t>
+            </a:r>
+            <a:r>
+              <a:rPr lang="en-US" sz="8100" dirty="0" spc="1" kern="0">
+                <a:solidFill>
+                  <a:srgbClr val="F3EEE3"/>
+                </a:solidFill>
+                <a:latin typeface="Bricolage Grotesque ExtraBold" pitchFamily="34" charset="0"/>
+                <a:ea typeface="Bricolage Grotesque ExtraBold" pitchFamily="34" charset="-122"/>
+                <a:cs typeface="Bricolage Grotesque ExtraBold" pitchFamily="34" charset="-120"/>
+              </a:rPr>
               <a:t> liệu</a:t>
             </a:r>
-            <a:endParaRPr lang="en-US" sz="7500" dirty="0"/>
+            <a:endParaRPr lang="en-US" sz="8100" dirty="0"/>
           </a:p>
         </p:txBody>
       </p:sp>
@@ -1864,7 +1875,7 @@
         </p:nvSpPr>
         <p:spPr>
           <a:xfrm>
-            <a:off x="914400" y="2762250"/>
+            <a:off x="914400" y="2857500"/>
             <a:ext cx="8382000" cy="1047750"/>
           </a:xfrm>
           <a:prstGeom prst="rect">
@@ -1972,7 +1983,7 @@
         </p:nvSpPr>
         <p:spPr>
           <a:xfrm>
-            <a:off x="914400" y="3619500"/>
+            <a:off x="914400" y="3810000"/>
             <a:ext cx="8382000" cy="457200"/>
           </a:xfrm>
           <a:prstGeom prst="rect">
@@ -11787,7 +11798,7 @@
               <a:buNone/>
             </a:pPr>
             <a:r>
-              <a:rPr lang="en-US" sz="6600" dirty="0" spc="-2" kern="0">
+              <a:rPr lang="en-US" sz="6900" dirty="0" spc="-2" kern="0">
                 <a:solidFill>
                   <a:srgbClr val="14161C"/>
                 </a:solidFill>
@@ -11795,10 +11806,10 @@
                 <a:ea typeface="Bricolage Grotesque ExtraBold" pitchFamily="34" charset="-122"/>
                 <a:cs typeface="Bricolage Grotesque ExtraBold" pitchFamily="34" charset="-120"/>
               </a:rPr>
-              <a:t>Bảng</a:t>
-            </a:r>
-            <a:r>
-              <a:rPr lang="en-US" sz="6600" dirty="0" spc="-4" kern="0">
+              <a:t>Bán</a:t>
+            </a:r>
+            <a:r>
+              <a:rPr lang="en-US" sz="6900" dirty="0" spc="2" kern="0">
                 <a:solidFill>
                   <a:srgbClr val="14161C"/>
                 </a:solidFill>
@@ -11806,10 +11817,10 @@
                 <a:ea typeface="Bricolage Grotesque ExtraBold" pitchFamily="34" charset="-122"/>
                 <a:cs typeface="Bricolage Grotesque ExtraBold" pitchFamily="34" charset="-120"/>
               </a:rPr>
-              <a:t> bán</a:t>
-            </a:r>
-            <a:r>
-              <a:rPr lang="en-US" sz="6600" dirty="0" spc="-1" kern="0">
+              <a:t> hàng</a:t>
+            </a:r>
+            <a:r>
+              <a:rPr lang="en-US" sz="6900" dirty="0" spc="1" kern="0">
                 <a:solidFill>
                   <a:srgbClr val="14161C"/>
                 </a:solidFill>
@@ -11817,10 +11828,10 @@
                 <a:ea typeface="Bricolage Grotesque ExtraBold" pitchFamily="34" charset="-122"/>
                 <a:cs typeface="Bricolage Grotesque ExtraBold" pitchFamily="34" charset="-120"/>
               </a:rPr>
-              <a:t> hàng</a:t>
-            </a:r>
-            <a:r>
-              <a:rPr lang="en-US" sz="6600" dirty="0" spc="3" kern="0">
+              <a:t> ở</a:t>
+            </a:r>
+            <a:r>
+              <a:rPr lang="en-US" sz="6900" dirty="0" spc="-40" kern="0">
                 <a:solidFill>
                   <a:srgbClr val="14161C"/>
                 </a:solidFill>
@@ -11828,10 +11839,10 @@
                 <a:ea typeface="Bricolage Grotesque ExtraBold" pitchFamily="34" charset="-122"/>
                 <a:cs typeface="Bricolage Grotesque ExtraBold" pitchFamily="34" charset="-120"/>
               </a:rPr>
-              <a:t> ở</a:t>
-            </a:r>
-            <a:r>
-              <a:rPr lang="en-US" sz="6600" dirty="0" spc="-38" kern="0">
+              <a:t> giữa,</a:t>
+            </a:r>
+            <a:r>
+              <a:rPr lang="en-US" sz="6900" dirty="0" spc="-3" kern="0">
                 <a:solidFill>
                   <a:srgbClr val="14161C"/>
                 </a:solidFill>
@@ -11839,10 +11850,10 @@
                 <a:ea typeface="Bricolage Grotesque ExtraBold" pitchFamily="34" charset="-122"/>
                 <a:cs typeface="Bricolage Grotesque ExtraBold" pitchFamily="34" charset="-120"/>
               </a:rPr>
-              <a:t> giữa,</a:t>
-            </a:r>
-            <a:r>
-              <a:rPr lang="en-US" sz="6600" dirty="0" spc="-3" kern="0">
+              <a:t> bảng</a:t>
+            </a:r>
+            <a:r>
+              <a:rPr lang="en-US" sz="6900" dirty="0" spc="6" kern="0">
                 <a:solidFill>
                   <a:srgbClr val="14161C"/>
                 </a:solidFill>
@@ -11850,10 +11861,10 @@
                 <a:ea typeface="Bricolage Grotesque ExtraBold" pitchFamily="34" charset="-122"/>
                 <a:cs typeface="Bricolage Grotesque ExtraBold" pitchFamily="34" charset="-120"/>
               </a:rPr>
-              <a:t> bảng</a:t>
-            </a:r>
-            <a:r>
-              <a:rPr lang="en-US" sz="6600" dirty="0" spc="0" kern="0">
+              <a:t> chiều</a:t>
+            </a:r>
+            <a:r>
+              <a:rPr lang="en-US" sz="6900" dirty="0" spc="1" kern="0">
                 <a:solidFill>
                   <a:srgbClr val="14161C"/>
                 </a:solidFill>
@@ -11861,31 +11872,9 @@
                 <a:ea typeface="Bricolage Grotesque ExtraBold" pitchFamily="34" charset="-122"/>
                 <a:cs typeface="Bricolage Grotesque ExtraBold" pitchFamily="34" charset="-120"/>
               </a:rPr>
-              <a:t> chiều</a:t>
-            </a:r>
-            <a:r>
-              <a:rPr lang="en-US" sz="6600" dirty="0" spc="-1" kern="0">
-                <a:solidFill>
-                  <a:srgbClr val="14161C"/>
-                </a:solidFill>
-                <a:latin typeface="Bricolage Grotesque ExtraBold" pitchFamily="34" charset="0"/>
-                <a:ea typeface="Bricolage Grotesque ExtraBold" pitchFamily="34" charset="-122"/>
-                <a:cs typeface="Bricolage Grotesque ExtraBold" pitchFamily="34" charset="-120"/>
-              </a:rPr>
-              <a:t> quanh</a:t>
-            </a:r>
-            <a:r>
-              <a:rPr lang="en-US" sz="6600" dirty="0" spc="2" kern="0">
-                <a:solidFill>
-                  <a:srgbClr val="14161C"/>
-                </a:solidFill>
-                <a:latin typeface="Bricolage Grotesque ExtraBold" pitchFamily="34" charset="0"/>
-                <a:ea typeface="Bricolage Grotesque ExtraBold" pitchFamily="34" charset="-122"/>
-                <a:cs typeface="Bricolage Grotesque ExtraBold" pitchFamily="34" charset="-120"/>
-              </a:rPr>
-              <a:t> nó</a:t>
-            </a:r>
-            <a:endParaRPr lang="en-US" sz="6600" dirty="0"/>
+              <a:t> quanh nó</a:t>
+            </a:r>
+            <a:endParaRPr lang="en-US" sz="6900" dirty="0"/>
           </a:p>
         </p:txBody>
       </p:sp>
@@ -14560,7 +14549,7 @@
               <a:buNone/>
             </a:pPr>
             <a:r>
-              <a:rPr lang="en-US" sz="6000" dirty="0" spc="-36" kern="0">
+              <a:rPr lang="en-US" sz="6900" dirty="0" spc="-45" kern="0">
                 <a:solidFill>
                   <a:srgbClr val="14161C"/>
                 </a:solidFill>
@@ -14571,7 +14560,7 @@
               <a:t>50.000</a:t>
             </a:r>
             <a:r>
-              <a:rPr lang="en-US" sz="6000" dirty="0" spc="-1" kern="0">
+              <a:rPr lang="en-US" sz="6900" dirty="0" spc="1" kern="0">
                 <a:solidFill>
                   <a:srgbClr val="14161C"/>
                 </a:solidFill>
@@ -14582,7 +14571,7 @@
               <a:t> sản</a:t>
             </a:r>
             <a:r>
-              <a:rPr lang="en-US" sz="6000" dirty="0" spc="0" kern="0">
+              <a:rPr lang="en-US" sz="6900" dirty="0" spc="0" kern="0">
                 <a:solidFill>
                   <a:srgbClr val="14161C"/>
                 </a:solidFill>
@@ -14593,7 +14582,7 @@
               <a:t> phẩm,</a:t>
             </a:r>
             <a:r>
-              <a:rPr lang="en-US" sz="6000" dirty="0" spc="-12" kern="0">
+              <a:rPr lang="en-US" sz="6900" dirty="0" spc="-9" kern="0">
                 <a:solidFill>
                   <a:srgbClr val="14161C"/>
                 </a:solidFill>
@@ -14604,7 +14593,7 @@
               <a:t> ngành</a:t>
             </a:r>
             <a:r>
-              <a:rPr lang="en-US" sz="6000" dirty="0" spc="1" kern="0">
+              <a:rPr lang="en-US" sz="6900" dirty="0" spc="0" kern="0">
                 <a:solidFill>
                   <a:srgbClr val="14161C"/>
                 </a:solidFill>
@@ -14615,7 +14604,7 @@
               <a:t> hay</a:t>
             </a:r>
             <a:r>
-              <a:rPr lang="en-US" sz="6000" dirty="0" spc="14" kern="0">
+              <a:rPr lang="en-US" sz="6900" dirty="0" spc="13" kern="0">
                 <a:solidFill>
                   <a:srgbClr val="14161C"/>
                 </a:solidFill>
@@ -14626,7 +14615,7 @@
               <a:t> đổi</a:t>
             </a:r>
             <a:r>
-              <a:rPr lang="en-US" sz="6000" dirty="0" spc="-16" kern="0">
+              <a:rPr lang="en-US" sz="6900" dirty="0" spc="-14" kern="0">
                 <a:solidFill>
                   <a:srgbClr val="14161C"/>
                 </a:solidFill>
@@ -14637,7 +14626,7 @@
               <a:t> tên:</a:t>
             </a:r>
             <a:r>
-              <a:rPr lang="en-US" sz="6000" dirty="0" spc="0" kern="0">
+              <a:rPr lang="en-US" sz="6900" dirty="0" spc="0" kern="0">
                 <a:solidFill>
                   <a:srgbClr val="14161C"/>
                 </a:solidFill>
@@ -14648,7 +14637,7 @@
               <a:t> chọn</a:t>
             </a:r>
             <a:r>
-              <a:rPr lang="en-US" sz="6000" dirty="0" spc="5" kern="0">
+              <a:rPr lang="en-US" sz="6900" dirty="0" spc="6" kern="0">
                 <a:solidFill>
                   <a:srgbClr val="14161C"/>
                 </a:solidFill>
@@ -14659,7 +14648,7 @@
               <a:t> kiểu</a:t>
             </a:r>
             <a:r>
-              <a:rPr lang="en-US" sz="6000" dirty="0" spc="-34" kern="0">
+              <a:rPr lang="en-US" sz="6900" dirty="0" spc="-40" kern="0">
                 <a:solidFill>
                   <a:srgbClr val="14161C"/>
                 </a:solidFill>
@@ -14669,7 +14658,7 @@
               </a:rPr>
               <a:t> nào?</a:t>
             </a:r>
-            <a:endParaRPr lang="en-US" sz="6000" dirty="0"/>
+            <a:endParaRPr lang="en-US" sz="6900" dirty="0"/>
           </a:p>
         </p:txBody>
       </p:sp>
